--- a/mon/toan/slide/lop12/Slide_TOAN12_OnTapGiuaKi1_T25.pptx
+++ b/mon/toan/slide/lop12/Slide_TOAN12_OnTapGiuaKi1_T25.pptx
@@ -680,6 +680,146 @@
           <a:p>
             <a:r>
               <a:t>Trước đó mời 1 nhóm trình chiếu sơ đồ tư duy số Chương I.</a:t>
+            </a:r>
+          </a:p>
+        </p:txBody>
+      </p:sp>
+      <p:sp>
+        <p:nvSpPr>
+          <p:cNvPr id="4" name="Slide Number Placeholder 3"/>
+          <p:cNvSpPr>
+            <a:spLocks noGrp="1"/>
+          </p:cNvSpPr>
+          <p:nvPr>
+            <p:ph type="sldNum" idx="5" sz="quarter"/>
+          </p:nvPr>
+        </p:nvSpPr>
+        <p:spPr/>
+      </p:sp>
+    </p:spTree>
+  </p:cSld>
+  <p:clrMapOvr>
+    <a:masterClrMapping/>
+  </p:clrMapOvr>
+</p:notes>
+</file>
+
+<file path=ppt/notesSlides/notesSlide4.xml><?xml version="1.0" encoding="utf-8"?>
+<p:notes xmlns:a="http://schemas.openxmlformats.org/drawingml/2006/main" xmlns:p="http://schemas.openxmlformats.org/presentationml/2006/main" xmlns:r="http://schemas.openxmlformats.org/officeDocument/2006/relationships">
+  <p:cSld>
+    <p:spTree>
+      <p:nvGrpSpPr>
+        <p:cNvPr id="1" name=""/>
+        <p:cNvGrpSpPr/>
+        <p:nvPr/>
+      </p:nvGrpSpPr>
+      <p:grpSpPr>
+        <a:xfrm>
+          <a:off x="0" y="0"/>
+          <a:ext cx="0" cy="0"/>
+          <a:chOff x="0" y="0"/>
+          <a:chExt cx="0" cy="0"/>
+        </a:xfrm>
+      </p:grpSpPr>
+      <p:sp>
+        <p:nvSpPr>
+          <p:cNvPr id="2" name="Slide Image Placeholder 1"/>
+          <p:cNvSpPr>
+            <a:spLocks noGrp="1"/>
+          </p:cNvSpPr>
+          <p:nvPr>
+            <p:ph type="sldImg" idx="2"/>
+          </p:nvPr>
+        </p:nvSpPr>
+        <p:spPr/>
+      </p:sp>
+      <p:sp>
+        <p:nvSpPr>
+          <p:cNvPr id="3" name="Notes Placeholder 2"/>
+          <p:cNvSpPr>
+            <a:spLocks noGrp="1"/>
+          </p:cNvSpPr>
+          <p:nvPr>
+            <p:ph type="body" idx="3" sz="quarter"/>
+          </p:nvPr>
+        </p:nvSpPr>
+        <p:spPr/>
+        <p:txBody>
+          <a:bodyPr/>
+          <a:lstStyle/>
+          <a:p>
+            <a:r>
+              <a:t>Cho hàm số y = f(x) = −x³ + 3x² + 1. Xét tính đúng, sai của các khẳng định.</a:t>
+            </a:r>
+          </a:p>
+        </p:txBody>
+      </p:sp>
+      <p:sp>
+        <p:nvSpPr>
+          <p:cNvPr id="4" name="Slide Number Placeholder 3"/>
+          <p:cNvSpPr>
+            <a:spLocks noGrp="1"/>
+          </p:cNvSpPr>
+          <p:nvPr>
+            <p:ph type="sldNum" idx="5" sz="quarter"/>
+          </p:nvPr>
+        </p:nvSpPr>
+        <p:spPr/>
+      </p:sp>
+    </p:spTree>
+  </p:cSld>
+  <p:clrMapOvr>
+    <a:masterClrMapping/>
+  </p:clrMapOvr>
+</p:notes>
+</file>
+
+<file path=ppt/notesSlides/notesSlide5.xml><?xml version="1.0" encoding="utf-8"?>
+<p:notes xmlns:a="http://schemas.openxmlformats.org/drawingml/2006/main" xmlns:p="http://schemas.openxmlformats.org/presentationml/2006/main" xmlns:r="http://schemas.openxmlformats.org/officeDocument/2006/relationships">
+  <p:cSld>
+    <p:spTree>
+      <p:nvGrpSpPr>
+        <p:cNvPr id="1" name=""/>
+        <p:cNvGrpSpPr/>
+        <p:nvPr/>
+      </p:nvGrpSpPr>
+      <p:grpSpPr>
+        <a:xfrm>
+          <a:off x="0" y="0"/>
+          <a:ext cx="0" cy="0"/>
+          <a:chOff x="0" y="0"/>
+          <a:chExt cx="0" cy="0"/>
+        </a:xfrm>
+      </p:grpSpPr>
+      <p:sp>
+        <p:nvSpPr>
+          <p:cNvPr id="2" name="Slide Image Placeholder 1"/>
+          <p:cNvSpPr>
+            <a:spLocks noGrp="1"/>
+          </p:cNvSpPr>
+          <p:nvPr>
+            <p:ph type="sldImg" idx="2"/>
+          </p:nvPr>
+        </p:nvSpPr>
+        <p:spPr/>
+      </p:sp>
+      <p:sp>
+        <p:nvSpPr>
+          <p:cNvPr id="3" name="Notes Placeholder 2"/>
+          <p:cNvSpPr>
+            <a:spLocks noGrp="1"/>
+          </p:cNvSpPr>
+          <p:nvPr>
+            <p:ph type="body" idx="3" sz="quarter"/>
+          </p:nvPr>
+        </p:nvSpPr>
+        <p:spPr/>
+        <p:txBody>
+          <a:bodyPr/>
+          <a:lstStyle/>
+          <a:p>
+            <a:r>
+              <a:t>Cho hàm số y = f(x) = −x³ + 3x² + 1. Xét tính đúng, sai của các khẳng định.</a:t>
             </a:r>
           </a:p>
         </p:txBody>
@@ -13424,7 +13564,7 @@
                 </a:solidFill>
                 <a:latin typeface="Arial"/>
               </a:rPr>
-              <a:t>CÂU 9</a:t>
+              <a:t>CÂU 9: HÀM SỐ BẬC BA</a:t>
             </a:r>
           </a:p>
         </p:txBody>
@@ -13538,20 +13678,20 @@
                   </a:spcAft>
                 </a:pPr>
                 <a:r>
-                  <a:rPr sz="2400">
-                    <a:solidFill>
-                      <a:srgbClr val="1E293B"/>
-                    </a:solidFill>
-                    <a:latin typeface="Calibri"/>
-                  </a:rPr>
-                  <a:t>Cho hàm số </a:t>
+                  <a:rPr sz="2400" b="1">
+                    <a:solidFill>
+                      <a:srgbClr val="1E40AF"/>
+                    </a:solidFill>
+                    <a:latin typeface="Calibri"/>
+                  </a:rPr>
+                  <a:t>Cho </a:t>
                 </a:r>
                 <a14:m>
-                  <m:oMath xmlns:m="http://schemas.openxmlformats.org/officeDocument/2006/math" xmlns:wpc="http://schemas.microsoft.com/office/word/2010/wordprocessingCanvas" xmlns:mo="http://schemas.microsoft.com/office/mac/office/2008/main" xmlns:mv="urn:schemas-microsoft-com:mac:vml" xmlns:o="urn:schemas-microsoft-com:office:office" xmlns:v="urn:schemas-microsoft-com:vml" xmlns:wp14="http://schemas.microsoft.com/office/word/2010/wordprocessingDrawing" xmlns:wp="http://schemas.openxmlformats.org/drawingml/2006/wordprocessingDrawing" xmlns:w10="urn:schemas-microsoft-com:office:word" xmlns:w="http://schemas.openxmlformats.org/wordprocessingml/2006/main" xmlns:w14="http://schemas.microsoft.com/office/word/2010/wordml" xmlns:wpg="http://schemas.microsoft.com/office/word/2010/wordprocessingGroup" xmlns:wpi="http://schemas.microsoft.com/office/word/2010/wordprocessingInk" xmlns:wne="http://schemas.microsoft.com/office/word/2006/wordml" xmlns:wps="http://schemas.microsoft.com/office/word/2010/wordprocessingShape">
+                  <m:oMath xmlns:m="http://schemas.openxmlformats.org/officeDocument/2006/math">
                     <m:r>
-                      <a:rPr lang="vi-VN" sz="2400" b="0">
+                      <a:rPr lang="vi-VN" sz="2400" b="1">
                         <a:solidFill>
-                          <a:srgbClr val="1E293B"/>
+                          <a:srgbClr val="1E40AF"/>
                         </a:solidFill>
                         <a:latin typeface="Cambria Math" panose="02040503050406030204" pitchFamily="18" charset="0"/>
                       </a:rPr>
@@ -13560,9 +13700,9 @@
                     <m:sSup>
                       <m:e>
                         <m:r>
-                          <a:rPr lang="vi-VN" sz="2400" b="0">
+                          <a:rPr lang="vi-VN" sz="2400" b="1">
                             <a:solidFill>
-                              <a:srgbClr val="1E293B"/>
+                              <a:srgbClr val="1E40AF"/>
                             </a:solidFill>
                             <a:latin typeface="Cambria Math" panose="02040503050406030204" pitchFamily="18" charset="0"/>
                           </a:rPr>
@@ -13571,9 +13711,9 @@
                       </m:e>
                       <m:sup>
                         <m:r>
-                          <a:rPr lang="vi-VN" sz="2400" b="0">
+                          <a:rPr lang="vi-VN" sz="2400" b="1">
                             <a:solidFill>
-                              <a:srgbClr val="1E293B"/>
+                              <a:srgbClr val="1E40AF"/>
                             </a:solidFill>
                             <a:latin typeface="Cambria Math" panose="02040503050406030204" pitchFamily="18" charset="0"/>
                           </a:rPr>
@@ -13582,9 +13722,9 @@
                       </m:sup>
                     </m:sSup>
                     <m:r>
-                      <a:rPr lang="vi-VN" sz="2400" b="0">
+                      <a:rPr lang="vi-VN" sz="2400" b="1">
                         <a:solidFill>
-                          <a:srgbClr val="1E293B"/>
+                          <a:srgbClr val="1E40AF"/>
                         </a:solidFill>
                         <a:latin typeface="Cambria Math" panose="02040503050406030204" pitchFamily="18" charset="0"/>
                       </a:rPr>
@@ -13593,9 +13733,9 @@
                     <m:sSup>
                       <m:e>
                         <m:r>
-                          <a:rPr lang="vi-VN" sz="2400" b="0">
+                          <a:rPr lang="vi-VN" sz="2400" b="1">
                             <a:solidFill>
-                              <a:srgbClr val="1E293B"/>
+                              <a:srgbClr val="1E40AF"/>
                             </a:solidFill>
                             <a:latin typeface="Cambria Math" panose="02040503050406030204" pitchFamily="18" charset="0"/>
                           </a:rPr>
@@ -13604,9 +13744,9 @@
                       </m:e>
                       <m:sup>
                         <m:r>
-                          <a:rPr lang="vi-VN" sz="2400" b="0">
+                          <a:rPr lang="vi-VN" sz="2400" b="1">
                             <a:solidFill>
-                              <a:srgbClr val="1E293B"/>
+                              <a:srgbClr val="1E40AF"/>
                             </a:solidFill>
                             <a:latin typeface="Cambria Math" panose="02040503050406030204" pitchFamily="18" charset="0"/>
                           </a:rPr>
@@ -13615,9 +13755,9 @@
                       </m:sup>
                     </m:sSup>
                     <m:r>
-                      <a:rPr lang="vi-VN" sz="2400" b="0">
+                      <a:rPr lang="vi-VN" sz="2400" b="1">
                         <a:solidFill>
-                          <a:srgbClr val="1E293B"/>
+                          <a:srgbClr val="1E40AF"/>
                         </a:solidFill>
                         <a:latin typeface="Cambria Math" panose="02040503050406030204" pitchFamily="18" charset="0"/>
                       </a:rPr>
@@ -13626,13 +13766,13 @@
                   </m:oMath>
                 </a14:m>
                 <a:r>
-                  <a:rPr sz="2400">
-                    <a:solidFill>
-                      <a:srgbClr val="1E293B"/>
-                    </a:solidFill>
-                    <a:latin typeface="Calibri"/>
-                  </a:rPr>
-                  <a:t>. Xét tính đúng, sai của các khẳng định sau:</a:t>
+                  <a:rPr sz="2400" b="1">
+                    <a:solidFill>
+                      <a:srgbClr val="1E40AF"/>
+                    </a:solidFill>
+                    <a:latin typeface="Calibri"/>
+                  </a:rPr>
+                  <a:t>. Xét tính đúng, sai:</a:t>
                 </a:r>
               </a:p>
               <a:p>
@@ -13847,15 +13987,23 @@
                   <a:t>d) Giá trị nhỏ nhất của hàm số trên đoạn </a:t>
                 </a:r>
                 <a14:m>
-                  <m:oMath xmlns:m="http://schemas.openxmlformats.org/officeDocument/2006/math" xmlns:wpc="http://schemas.microsoft.com/office/word/2010/wordprocessingCanvas" xmlns:mo="http://schemas.microsoft.com/office/mac/office/2008/main" xmlns:mv="urn:schemas-microsoft-com:mac:vml" xmlns:o="urn:schemas-microsoft-com:office:office" xmlns:v="urn:schemas-microsoft-com:vml" xmlns:wp14="http://schemas.microsoft.com/office/word/2010/wordprocessingDrawing" xmlns:wp="http://schemas.openxmlformats.org/drawingml/2006/wordprocessingDrawing" xmlns:w10="urn:schemas-microsoft-com:office:word" xmlns:w="http://schemas.openxmlformats.org/wordprocessingml/2006/main" xmlns:w14="http://schemas.microsoft.com/office/word/2010/wordml" xmlns:wpg="http://schemas.microsoft.com/office/word/2010/wordprocessingGroup" xmlns:wpi="http://schemas.microsoft.com/office/word/2010/wordprocessingInk" xmlns:wne="http://schemas.microsoft.com/office/word/2006/wordml" xmlns:wps="http://schemas.microsoft.com/office/word/2010/wordprocessingShape">
+                  <m:oMath xmlns:m="http://schemas.openxmlformats.org/officeDocument/2006/math">
                     <m:d>
                       <m:dPr>
                         <m:begChr m:val="["/>
-                        <m:sepChr m:val="−"/>
+                        <m:sepChr m:val=""/>
                         <m:endChr m:val="]"/>
                       </m:dPr>
-                      <m:e/>
                       <m:e>
+                        <m:r>
+                          <a:rPr lang="vi-VN" sz="2400" b="0">
+                            <a:solidFill>
+                              <a:srgbClr val="1E293B"/>
+                            </a:solidFill>
+                            <a:latin typeface="Cambria Math" panose="02040503050406030204" pitchFamily="18" charset="0"/>
+                          </a:rPr>
+                          <m:t>−</m:t>
+                        </m:r>
                         <m:r>
                           <a:rPr lang="vi-VN" sz="2400" b="0">
                             <a:solidFill>
@@ -13897,7 +14045,7 @@
                   <a:t> bằng </a:t>
                 </a:r>
                 <a14:m>
-                  <m:oMath xmlns:m="http://schemas.openxmlformats.org/officeDocument/2006/math" xmlns:wpc="http://schemas.microsoft.com/office/word/2010/wordprocessingCanvas" xmlns:mo="http://schemas.microsoft.com/office/mac/office/2008/main" xmlns:mv="urn:schemas-microsoft-com:mac:vml" xmlns:o="urn:schemas-microsoft-com:office:office" xmlns:v="urn:schemas-microsoft-com:vml" xmlns:wp14="http://schemas.microsoft.com/office/word/2010/wordprocessingDrawing" xmlns:wp="http://schemas.openxmlformats.org/drawingml/2006/wordprocessingDrawing" xmlns:w10="urn:schemas-microsoft-com:office:word" xmlns:w="http://schemas.openxmlformats.org/wordprocessingml/2006/main" xmlns:w14="http://schemas.microsoft.com/office/word/2010/wordml" xmlns:wpg="http://schemas.microsoft.com/office/word/2010/wordprocessingGroup" xmlns:wpi="http://schemas.microsoft.com/office/word/2010/wordprocessingInk" xmlns:wne="http://schemas.microsoft.com/office/word/2006/wordml" xmlns:wps="http://schemas.microsoft.com/office/word/2010/wordprocessingShape">
+                  <m:oMath xmlns:m="http://schemas.openxmlformats.org/officeDocument/2006/math">
                     <m:r>
                       <a:rPr lang="vi-VN" sz="2400" b="0">
                         <a:solidFill>
@@ -13932,7 +14080,7 @@
                     </a:solidFill>
                     <a:latin typeface="Calibri"/>
                   </a:rPr>
-                  <a:t>Gợi mở: Lập bảng biến thiên; nhớ tính giá trị tại hai đầu mút</a:t>
+                  <a:t>Gợi mở: Lập bảng biến thiên, tính cả giá trị tại hai đầu mút</a:t>
                 </a:r>
               </a:p>
             </p:txBody>
@@ -13967,26 +14115,26 @@
                   </a:spcAft>
                 </a:pPr>
                 <a:r>
-                  <a:rPr sz="2400">
-                    <a:solidFill>
-                      <a:srgbClr val="1E293B"/>
-                    </a:solidFill>
-                    <a:latin typeface="Calibri"/>
-                  </a:rPr>
-                  <a:t>Cho hàm số </a:t>
+                  <a:rPr sz="2400" b="1">
+                    <a:solidFill>
+                      <a:srgbClr val="1E40AF"/>
+                    </a:solidFill>
+                    <a:latin typeface="Calibri"/>
+                  </a:rPr>
+                  <a:t>Cho </a:t>
                 </a:r>
                 <a:r>
                   <a:rPr lang="vi-VN"/>
-                  <a:t>y=f(x)=−x^3+3x^2+1</a:t>
-                </a:r>
-                <a:r>
-                  <a:rPr sz="2400">
-                    <a:solidFill>
-                      <a:srgbClr val="1E293B"/>
-                    </a:solidFill>
-                    <a:latin typeface="Calibri"/>
-                  </a:rPr>
-                  <a:t>. Xét tính đúng, sai của các khẳng định sau:</a:t>
+                  <a:t>y=f(x)=-x^3+3x^2+1</a:t>
+                </a:r>
+                <a:r>
+                  <a:rPr sz="2400" b="1">
+                    <a:solidFill>
+                      <a:srgbClr val="1E40AF"/>
+                    </a:solidFill>
+                    <a:latin typeface="Calibri"/>
+                  </a:rPr>
+                  <a:t>. Xét tính đúng, sai:</a:t>
                 </a:r>
               </a:p>
               <a:p>
@@ -14093,7 +14241,7 @@
                 </a:r>
                 <a:r>
                   <a:rPr lang="vi-VN"/>
-                  <a:t>[ 1;3]</a:t>
+                  <a:t>[-1;3]</a:t>
                 </a:r>
                 <a:r>
                   <a:rPr sz="2400">
@@ -14131,7 +14279,7 @@
                     </a:solidFill>
                     <a:latin typeface="Calibri"/>
                   </a:rPr>
-                  <a:t>Gợi mở: Lập bảng biến thiên; nhớ tính giá trị tại hai đầu mút</a:t>
+                  <a:t>Gợi mở: Lập bảng biến thiên, tính cả giá trị tại hai đầu mút</a:t>
                 </a:r>
               </a:p>
             </p:txBody>
@@ -14290,7 +14438,7 @@
                 </a:solidFill>
                 <a:latin typeface="Arial"/>
               </a:rPr>
-              <a:t>CÂU 9</a:t>
+              <a:t>CÂU 9: HÀM SỐ BẬC BA</a:t>
             </a:r>
           </a:p>
         </p:txBody>
@@ -19645,7 +19793,7 @@
                   <a:t>Có bao nhiêu giá trị nguyên của tham số </a:t>
                 </a:r>
                 <a14:m>
-                  <m:oMath xmlns:m="http://schemas.openxmlformats.org/officeDocument/2006/math" xmlns:wpc="http://schemas.microsoft.com/office/word/2010/wordprocessingCanvas" xmlns:mo="http://schemas.microsoft.com/office/mac/office/2008/main" xmlns:mv="urn:schemas-microsoft-com:mac:vml" xmlns:o="urn:schemas-microsoft-com:office:office" xmlns:v="urn:schemas-microsoft-com:vml" xmlns:wp14="http://schemas.microsoft.com/office/word/2010/wordprocessingDrawing" xmlns:wp="http://schemas.openxmlformats.org/drawingml/2006/wordprocessingDrawing" xmlns:w10="urn:schemas-microsoft-com:office:word" xmlns:w="http://schemas.openxmlformats.org/wordprocessingml/2006/main" xmlns:w14="http://schemas.microsoft.com/office/word/2010/wordml" xmlns:wpg="http://schemas.microsoft.com/office/word/2010/wordprocessingGroup" xmlns:wpi="http://schemas.microsoft.com/office/word/2010/wordprocessingInk" xmlns:wne="http://schemas.microsoft.com/office/word/2006/wordml" xmlns:wps="http://schemas.microsoft.com/office/word/2010/wordprocessingShape">
+                  <m:oMath xmlns:m="http://schemas.openxmlformats.org/officeDocument/2006/math">
                     <m:r>
                       <a:rPr lang="vi-VN" sz="2400" b="0">
                         <a:solidFill>
@@ -19667,15 +19815,23 @@
                   <a:t> thuộc đoạn </a:t>
                 </a:r>
                 <a14:m>
-                  <m:oMath xmlns:m="http://schemas.openxmlformats.org/officeDocument/2006/math" xmlns:wpc="http://schemas.microsoft.com/office/word/2010/wordprocessingCanvas" xmlns:mo="http://schemas.microsoft.com/office/mac/office/2008/main" xmlns:mv="urn:schemas-microsoft-com:mac:vml" xmlns:o="urn:schemas-microsoft-com:office:office" xmlns:v="urn:schemas-microsoft-com:vml" xmlns:wp14="http://schemas.microsoft.com/office/word/2010/wordprocessingDrawing" xmlns:wp="http://schemas.openxmlformats.org/drawingml/2006/wordprocessingDrawing" xmlns:w10="urn:schemas-microsoft-com:office:word" xmlns:w="http://schemas.openxmlformats.org/wordprocessingml/2006/main" xmlns:w14="http://schemas.microsoft.com/office/word/2010/wordml" xmlns:wpg="http://schemas.microsoft.com/office/word/2010/wordprocessingGroup" xmlns:wpi="http://schemas.microsoft.com/office/word/2010/wordprocessingInk" xmlns:wne="http://schemas.microsoft.com/office/word/2006/wordml" xmlns:wps="http://schemas.microsoft.com/office/word/2010/wordprocessingShape">
+                  <m:oMath xmlns:m="http://schemas.openxmlformats.org/officeDocument/2006/math">
                     <m:d>
                       <m:dPr>
                         <m:begChr m:val="["/>
-                        <m:sepChr m:val="−"/>
+                        <m:sepChr m:val=""/>
                         <m:endChr m:val="]"/>
                       </m:dPr>
-                      <m:e/>
                       <m:e>
+                        <m:r>
+                          <a:rPr lang="vi-VN" sz="2400" b="0">
+                            <a:solidFill>
+                              <a:srgbClr val="1E293B"/>
+                            </a:solidFill>
+                            <a:latin typeface="Cambria Math" panose="02040503050406030204" pitchFamily="18" charset="0"/>
+                          </a:rPr>
+                          <m:t>−</m:t>
+                        </m:r>
                         <m:r>
                           <a:rPr lang="vi-VN" sz="2400" b="0">
                             <a:solidFill>
@@ -19717,7 +19873,7 @@
                   <a:t> để hàm số </a:t>
                 </a:r>
                 <a14:m>
-                  <m:oMath xmlns:m="http://schemas.openxmlformats.org/officeDocument/2006/math" xmlns:wpc="http://schemas.microsoft.com/office/word/2010/wordprocessingCanvas" xmlns:mo="http://schemas.microsoft.com/office/mac/office/2008/main" xmlns:mv="urn:schemas-microsoft-com:mac:vml" xmlns:o="urn:schemas-microsoft-com:office:office" xmlns:v="urn:schemas-microsoft-com:vml" xmlns:wp14="http://schemas.microsoft.com/office/word/2010/wordprocessingDrawing" xmlns:wp="http://schemas.openxmlformats.org/drawingml/2006/wordprocessingDrawing" xmlns:w10="urn:schemas-microsoft-com:office:word" xmlns:w="http://schemas.openxmlformats.org/wordprocessingml/2006/main" xmlns:w14="http://schemas.microsoft.com/office/word/2010/wordml" xmlns:wpg="http://schemas.microsoft.com/office/word/2010/wordprocessingGroup" xmlns:wpi="http://schemas.microsoft.com/office/word/2010/wordprocessingInk" xmlns:wne="http://schemas.microsoft.com/office/word/2006/wordml" xmlns:wps="http://schemas.microsoft.com/office/word/2010/wordprocessingShape">
+                  <m:oMath xmlns:m="http://schemas.openxmlformats.org/officeDocument/2006/math">
                     <m:r>
                       <a:rPr lang="vi-VN" sz="2400" b="0">
                         <a:solidFill>
@@ -19805,7 +19961,7 @@
                   <a:t> đồng biến trên </a:t>
                 </a:r>
                 <a14:m>
-                  <m:oMath xmlns:m="http://schemas.openxmlformats.org/officeDocument/2006/math" xmlns:wpc="http://schemas.microsoft.com/office/word/2010/wordprocessingCanvas" xmlns:mo="http://schemas.microsoft.com/office/mac/office/2008/main" xmlns:mv="urn:schemas-microsoft-com:mac:vml" xmlns:o="urn:schemas-microsoft-com:office:office" xmlns:v="urn:schemas-microsoft-com:vml" xmlns:wp14="http://schemas.microsoft.com/office/word/2010/wordprocessingDrawing" xmlns:wp="http://schemas.openxmlformats.org/drawingml/2006/wordprocessingDrawing" xmlns:w10="urn:schemas-microsoft-com:office:word" xmlns:w="http://schemas.openxmlformats.org/wordprocessingml/2006/main" xmlns:w14="http://schemas.microsoft.com/office/word/2010/wordml" xmlns:wpg="http://schemas.microsoft.com/office/word/2010/wordprocessingGroup" xmlns:wpi="http://schemas.microsoft.com/office/word/2010/wordprocessingInk" xmlns:wne="http://schemas.microsoft.com/office/word/2006/wordml" xmlns:wps="http://schemas.microsoft.com/office/word/2010/wordprocessingShape">
+                  <m:oMath xmlns:m="http://schemas.openxmlformats.org/officeDocument/2006/math">
                     <m:r>
                       <a:rPr lang="vi-VN" sz="2400" b="0">
                         <a:solidFill>
@@ -19979,7 +20135,7 @@
                 </a:r>
                 <a:r>
                   <a:rPr lang="vi-VN"/>
-                  <a:t>[ 10;10]</a:t>
+                  <a:t>[-10;10]</a:t>
                 </a:r>
                 <a:r>
                   <a:rPr sz="2400">
@@ -19992,7 +20148,7 @@
                 </a:r>
                 <a:r>
                   <a:rPr lang="vi-VN"/>
-                  <a:t>y=x^3−3x^2+mx</a:t>
+                  <a:t>y=x^3-3x^2+mx</a:t>
                 </a:r>
                 <a:r>
                   <a:rPr sz="2400">
@@ -20005,7 +20161,7 @@
                 </a:r>
                 <a:r>
                   <a:rPr lang="vi-VN"/>
-                  <a:t>ℝ</a:t>
+                  <a:t>\mathbb{R}</a:t>
                 </a:r>
                 <a:r>
                   <a:rPr sz="2400">
